--- a/presentations/Physics_Guided_Finetune_Update/Physics_Guided_Finetune_Update.pptx
+++ b/presentations/Physics_Guided_Finetune_Update/Physics_Guided_Finetune_Update.pptx
@@ -13,6 +13,9 @@
     <p:sldId id="261" r:id="rId12"/>
     <p:sldId id="262" r:id="rId13"/>
     <p:sldId id="263" r:id="rId14"/>
+    <p:sldId id="264" r:id="rId15"/>
+    <p:sldId id="265" r:id="rId16"/>
+    <p:sldId id="266" r:id="rId17"/>
   </p:sldIdLst>
   <p:sldSz cx="12191695" cy="6858000" type="screen4x3"/>
   <p:notesSz cx="6858000" cy="9144000"/>
@@ -3339,6 +3342,1145 @@
                 <a:latin typeface="Calibri"/>
               </a:rPr>
               <a:t>A new experiment: adapted a physics-guided learning framework (PhyDL-NWP, KDD'25) to LAI forecasting, and used it to fine-tune Chronos-2 - what was built, and what a small-scale validation shows so far.</a:t>
+            </a:r>
+          </a:p>
+        </p:txBody>
+      </p:sp>
+    </p:spTree>
+  </p:cSld>
+  <p:clrMapOvr>
+    <a:masterClrMapping/>
+  </p:clrMapOvr>
+</p:sld>
+</file>
+
+<file path=ppt/slides/slide10.xml><?xml version="1.0" encoding="utf-8"?>
+<p:sld xmlns:a="http://schemas.openxmlformats.org/drawingml/2006/main" xmlns:p="http://schemas.openxmlformats.org/presentationml/2006/main" xmlns:r="http://schemas.openxmlformats.org/officeDocument/2006/relationships">
+  <p:cSld>
+    <p:bg>
+      <p:bgPr>
+        <a:solidFill>
+          <a:srgbClr val="FFFFFF"/>
+        </a:solidFill>
+        <a:effectLst/>
+      </p:bgPr>
+    </p:bg>
+    <p:spTree>
+      <p:nvGrpSpPr>
+        <p:cNvPr id="1" name=""/>
+        <p:cNvGrpSpPr/>
+        <p:nvPr/>
+      </p:nvGrpSpPr>
+      <p:grpSpPr/>
+      <p:sp>
+        <p:nvSpPr>
+          <p:cNvPr id="2" name="TextBox 1"/>
+          <p:cNvSpPr txBox="1"/>
+          <p:nvPr/>
+        </p:nvSpPr>
+        <p:spPr>
+          <a:xfrm>
+            <a:off x="502920" y="384048"/>
+            <a:ext cx="10972800" cy="292608"/>
+          </a:xfrm>
+          <a:prstGeom prst="rect">
+            <a:avLst/>
+          </a:prstGeom>
+          <a:noFill/>
+        </p:spPr>
+        <p:txBody>
+          <a:bodyPr wrap="square" anchor="t" lIns="0" rIns="0" tIns="0" bIns="0">
+            <a:spAutoFit/>
+          </a:bodyPr>
+          <a:lstStyle/>
+          <a:p>
+            <a:pPr algn="l">
+              <a:lnSpc>
+                <a:spcPct val="100000"/>
+              </a:lnSpc>
+            </a:pPr>
+            <a:r>
+              <a:rPr sz="1300" b="1" i="0">
+                <a:solidFill>
+                  <a:srgbClr val="2A78D6"/>
+                </a:solidFill>
+                <a:latin typeface="Calibri"/>
+              </a:rPr>
+              <a:t>PHYSICS-GUIDED FINE-TUNING, ROUND 2</a:t>
+            </a:r>
+          </a:p>
+        </p:txBody>
+      </p:sp>
+      <p:sp>
+        <p:nvSpPr>
+          <p:cNvPr id="3" name="TextBox 2"/>
+          <p:cNvSpPr txBox="1"/>
+          <p:nvPr/>
+        </p:nvSpPr>
+        <p:spPr>
+          <a:xfrm>
+            <a:off x="502920" y="658368"/>
+            <a:ext cx="11155680" cy="566928"/>
+          </a:xfrm>
+          <a:prstGeom prst="rect">
+            <a:avLst/>
+          </a:prstGeom>
+          <a:noFill/>
+        </p:spPr>
+        <p:txBody>
+          <a:bodyPr wrap="square" anchor="t" lIns="0" rIns="0" tIns="0" bIns="0">
+            <a:spAutoFit/>
+          </a:bodyPr>
+          <a:lstStyle/>
+          <a:p>
+            <a:pPr algn="l">
+              <a:lnSpc>
+                <a:spcPct val="100000"/>
+              </a:lnSpc>
+            </a:pPr>
+            <a:r>
+              <a:rPr sz="2300" b="1" i="0">
+                <a:solidFill>
+                  <a:srgbClr val="1C2119"/>
+                </a:solidFill>
+                <a:latin typeface="Calibri"/>
+              </a:rPr>
+              <a:t>GPP Experiment: Data Fetched, Scope Limited</a:t>
+            </a:r>
+          </a:p>
+        </p:txBody>
+      </p:sp>
+      <p:sp>
+        <p:nvSpPr>
+          <p:cNvPr id="4" name="Rectangle 3"/>
+          <p:cNvSpPr/>
+          <p:nvPr/>
+        </p:nvSpPr>
+        <p:spPr>
+          <a:xfrm>
+            <a:off x="502920" y="1261872"/>
+            <a:ext cx="914400" cy="38100"/>
+          </a:xfrm>
+          <a:prstGeom prst="rect">
+            <a:avLst/>
+          </a:prstGeom>
+          <a:solidFill>
+            <a:srgbClr val="2A78D6"/>
+          </a:solidFill>
+          <a:ln>
+            <a:noFill/>
+          </a:ln>
+          <a:effectLst/>
+        </p:spPr>
+        <p:style>
+          <a:lnRef idx="1">
+            <a:schemeClr val="accent1"/>
+          </a:lnRef>
+          <a:fillRef idx="3">
+            <a:schemeClr val="accent1"/>
+          </a:fillRef>
+          <a:effectRef idx="2">
+            <a:schemeClr val="accent1"/>
+          </a:effectRef>
+          <a:fontRef idx="minor">
+            <a:schemeClr val="lt1"/>
+          </a:fontRef>
+        </p:style>
+        <p:txBody>
+          <a:bodyPr rtlCol="0" anchor="ctr"/>
+          <a:lstStyle/>
+          <a:p>
+            <a:pPr algn="ctr"/>
+          </a:p>
+        </p:txBody>
+      </p:sp>
+      <p:sp>
+        <p:nvSpPr>
+          <p:cNvPr id="5" name="TextBox 4"/>
+          <p:cNvSpPr txBox="1"/>
+          <p:nvPr/>
+        </p:nvSpPr>
+        <p:spPr>
+          <a:xfrm>
+            <a:off x="11551615" y="384048"/>
+            <a:ext cx="365760" cy="274320"/>
+          </a:xfrm>
+          <a:prstGeom prst="rect">
+            <a:avLst/>
+          </a:prstGeom>
+          <a:noFill/>
+        </p:spPr>
+        <p:txBody>
+          <a:bodyPr wrap="square" anchor="t" lIns="0" rIns="0" tIns="0" bIns="0">
+            <a:spAutoFit/>
+          </a:bodyPr>
+          <a:lstStyle/>
+          <a:p>
+            <a:pPr algn="r">
+              <a:lnSpc>
+                <a:spcPct val="100000"/>
+              </a:lnSpc>
+            </a:pPr>
+            <a:r>
+              <a:rPr sz="1100" b="0" i="0">
+                <a:solidFill>
+                  <a:srgbClr val="8B9382"/>
+                </a:solidFill>
+                <a:latin typeface="Calibri"/>
+              </a:rPr>
+              <a:t>10</a:t>
+            </a:r>
+          </a:p>
+        </p:txBody>
+      </p:sp>
+      <p:sp>
+        <p:nvSpPr>
+          <p:cNvPr id="6" name="TextBox 5"/>
+          <p:cNvSpPr txBox="1"/>
+          <p:nvPr/>
+        </p:nvSpPr>
+        <p:spPr>
+          <a:xfrm>
+            <a:off x="502920" y="1143000"/>
+            <a:ext cx="10789920" cy="3108960"/>
+          </a:xfrm>
+          <a:prstGeom prst="rect">
+            <a:avLst/>
+          </a:prstGeom>
+          <a:noFill/>
+        </p:spPr>
+        <p:txBody>
+          <a:bodyPr wrap="square" anchor="t" lIns="0" rIns="0">
+            <a:spAutoFit/>
+          </a:bodyPr>
+          <a:lstStyle/>
+          <a:p>
+            <a:pPr>
+              <a:lnSpc>
+                <a:spcPct val="106000"/>
+              </a:lnSpc>
+              <a:spcAft>
+                <a:spcPts val="900"/>
+              </a:spcAft>
+            </a:pPr>
+            <a:r>
+              <a:rPr sz="1400">
+                <a:solidFill>
+                  <a:srgbClr val="5C6355"/>
+                </a:solidFill>
+                <a:latin typeface="Calibri"/>
+              </a:rPr>
+              <a:t>▪  </a:t>
+            </a:r>
+            <a:r>
+              <a:rPr sz="1400">
+                <a:solidFill>
+                  <a:srgbClr val="1C2119"/>
+                </a:solidFill>
+                <a:latin typeface="Calibri"/>
+              </a:rPr>
+              <a:t>Checked for GPP (or a similar productivity/phenology indicator) anywhere in this project's existing data: absent, for both CONUS and the global pool. Fetched MODIS MOD17A2H GPP for the 70 CONUS sites via the same AppEEARS pipeline already used for LAI.</a:t>
+            </a:r>
+          </a:p>
+          <a:p>
+            <a:pPr>
+              <a:lnSpc>
+                <a:spcPct val="106000"/>
+              </a:lnSpc>
+              <a:spcAft>
+                <a:spcPts val="900"/>
+              </a:spcAft>
+            </a:pPr>
+            <a:r>
+              <a:rPr sz="1400">
+                <a:solidFill>
+                  <a:srgbClr val="5C6355"/>
+                </a:solidFill>
+                <a:latin typeface="Calibri"/>
+              </a:rPr>
+              <a:t>▪  </a:t>
+            </a:r>
+            <a:r>
+              <a:rPr sz="1400">
+                <a:solidFill>
+                  <a:srgbClr val="1C2119"/>
+                </a:solidFill>
+                <a:latin typeface="Calibri"/>
+              </a:rPr>
+              <a:t>Requested the full 2000-2022 history (matching every other dataset in this project) - AppEEARS returned usable data for 2021-2022 only (2 years), for all 70 sites alike. The request was correctly specified; this is a genuine limit on MOD17A2H.061's retrievable history through AppEEARS, not a configuration error.</a:t>
+            </a:r>
+          </a:p>
+          <a:p>
+            <a:pPr>
+              <a:lnSpc>
+                <a:spcPct val="106000"/>
+              </a:lnSpc>
+              <a:spcAft>
+                <a:spcPts val="900"/>
+              </a:spcAft>
+            </a:pPr>
+            <a:r>
+              <a:rPr sz="1400">
+                <a:solidFill>
+                  <a:srgbClr val="5C6355"/>
+                </a:solidFill>
+                <a:latin typeface="Calibri"/>
+              </a:rPr>
+              <a:t>▪  </a:t>
+            </a:r>
+            <a:r>
+              <a:rPr sz="1400">
+                <a:solidFill>
+                  <a:srgbClr val="1C2119"/>
+                </a:solidFill>
+                <a:latin typeface="Calibri"/>
+              </a:rPr>
+              <a:t>PAR, soil moisture, and SPEI are also absent from this project's data. Approximated for the LAI validation (slide 7c) as: PAR ≈ 0.45×shortwave radiation (standard ecology convention); SM and SPEI as water-balance (precipitation − PET) proxies at two timescales, since true soil-moisture/SPEI products (TerraClimate, monthly) don't align with this project's 8-day cadence - PET itself was newly extracted from gridMET, already on the same 8-day composite grid as everything else.</a:t>
+            </a:r>
+          </a:p>
+          <a:p>
+            <a:pPr>
+              <a:lnSpc>
+                <a:spcPct val="106000"/>
+              </a:lnSpc>
+              <a:spcAft>
+                <a:spcPts val="900"/>
+              </a:spcAft>
+            </a:pPr>
+            <a:r>
+              <a:rPr sz="1400">
+                <a:solidFill>
+                  <a:srgbClr val="5C6355"/>
+                </a:solidFill>
+                <a:latin typeface="Calibri"/>
+              </a:rPr>
+              <a:t>▪  </a:t>
+            </a:r>
+            <a:r>
+              <a:rPr sz="1400">
+                <a:solidFill>
+                  <a:srgbClr val="1C2119"/>
+                </a:solidFill>
+                <a:latin typeface="Calibri"/>
+              </a:rPr>
+              <a:t>With only 2 years, a GPP forecasting comparison (zero-shot vs. fine-tuned, LOYO-CV style) isn't meaningful yet - paused rather than run on too little data to support a real conclusion.</a:t>
+            </a:r>
+          </a:p>
+        </p:txBody>
+      </p:sp>
+      <p:sp>
+        <p:nvSpPr>
+          <p:cNvPr id="7" name="Rectangle 6"/>
+          <p:cNvSpPr/>
+          <p:nvPr/>
+        </p:nvSpPr>
+        <p:spPr>
+          <a:xfrm>
+            <a:off x="0" y="6144768"/>
+            <a:ext cx="12191695" cy="713232"/>
+          </a:xfrm>
+          <a:prstGeom prst="rect">
+            <a:avLst/>
+          </a:prstGeom>
+          <a:solidFill>
+            <a:srgbClr val="E7F0E6"/>
+          </a:solidFill>
+          <a:ln>
+            <a:noFill/>
+          </a:ln>
+          <a:effectLst/>
+        </p:spPr>
+        <p:style>
+          <a:lnRef idx="1">
+            <a:schemeClr val="accent1"/>
+          </a:lnRef>
+          <a:fillRef idx="3">
+            <a:schemeClr val="accent1"/>
+          </a:fillRef>
+          <a:effectRef idx="2">
+            <a:schemeClr val="accent1"/>
+          </a:effectRef>
+          <a:fontRef idx="minor">
+            <a:schemeClr val="lt1"/>
+          </a:fontRef>
+        </p:style>
+        <p:txBody>
+          <a:bodyPr rtlCol="0" anchor="ctr"/>
+          <a:lstStyle/>
+          <a:p>
+            <a:pPr algn="ctr"/>
+          </a:p>
+        </p:txBody>
+      </p:sp>
+      <p:sp>
+        <p:nvSpPr>
+          <p:cNvPr id="8" name="Rectangle 7"/>
+          <p:cNvSpPr/>
+          <p:nvPr/>
+        </p:nvSpPr>
+        <p:spPr>
+          <a:xfrm>
+            <a:off x="0" y="6144768"/>
+            <a:ext cx="109728" cy="713232"/>
+          </a:xfrm>
+          <a:prstGeom prst="rect">
+            <a:avLst/>
+          </a:prstGeom>
+          <a:solidFill>
+            <a:srgbClr val="2F6F5E"/>
+          </a:solidFill>
+          <a:ln>
+            <a:noFill/>
+          </a:ln>
+          <a:effectLst/>
+        </p:spPr>
+        <p:style>
+          <a:lnRef idx="1">
+            <a:schemeClr val="accent1"/>
+          </a:lnRef>
+          <a:fillRef idx="3">
+            <a:schemeClr val="accent1"/>
+          </a:fillRef>
+          <a:effectRef idx="2">
+            <a:schemeClr val="accent1"/>
+          </a:effectRef>
+          <a:fontRef idx="minor">
+            <a:schemeClr val="lt1"/>
+          </a:fontRef>
+        </p:style>
+        <p:txBody>
+          <a:bodyPr rtlCol="0" anchor="ctr"/>
+          <a:lstStyle/>
+          <a:p>
+            <a:pPr algn="ctr"/>
+          </a:p>
+        </p:txBody>
+      </p:sp>
+      <p:sp>
+        <p:nvSpPr>
+          <p:cNvPr id="9" name="TextBox 8"/>
+          <p:cNvSpPr txBox="1"/>
+          <p:nvPr/>
+        </p:nvSpPr>
+        <p:spPr>
+          <a:xfrm>
+            <a:off x="411480" y="6144768"/>
+            <a:ext cx="11368735" cy="713232"/>
+          </a:xfrm>
+          <a:prstGeom prst="rect">
+            <a:avLst/>
+          </a:prstGeom>
+          <a:noFill/>
+        </p:spPr>
+        <p:txBody>
+          <a:bodyPr wrap="square" anchor="ctr" lIns="0" rIns="0" tIns="0" bIns="0">
+            <a:spAutoFit/>
+          </a:bodyPr>
+          <a:lstStyle/>
+          <a:p>
+            <a:pPr algn="l">
+              <a:lnSpc>
+                <a:spcPct val="100000"/>
+              </a:lnSpc>
+            </a:pPr>
+            <a:r>
+              <a:rPr sz="1200" b="1" i="0">
+                <a:solidFill>
+                  <a:srgbClr val="1E4A33"/>
+                </a:solidFill>
+                <a:latin typeface="Calibri"/>
+              </a:rPr>
+              <a:t>TAKEAWAY   </a:t>
+            </a:r>
+          </a:p>
+        </p:txBody>
+      </p:sp>
+      <p:sp>
+        <p:nvSpPr>
+          <p:cNvPr id="10" name="TextBox 9"/>
+          <p:cNvSpPr txBox="1"/>
+          <p:nvPr/>
+        </p:nvSpPr>
+        <p:spPr>
+          <a:xfrm>
+            <a:off x="1417320" y="6144768"/>
+            <a:ext cx="10362895" cy="713232"/>
+          </a:xfrm>
+          <a:prstGeom prst="rect">
+            <a:avLst/>
+          </a:prstGeom>
+          <a:noFill/>
+        </p:spPr>
+        <p:txBody>
+          <a:bodyPr wrap="square" anchor="ctr" lIns="0" rIns="0" tIns="0" bIns="0">
+            <a:spAutoFit/>
+          </a:bodyPr>
+          <a:lstStyle/>
+          <a:p>
+            <a:pPr algn="l">
+              <a:lnSpc>
+                <a:spcPct val="100000"/>
+              </a:lnSpc>
+            </a:pPr>
+            <a:r>
+              <a:rPr sz="1450" b="1" i="0">
+                <a:solidFill>
+                  <a:srgbClr val="1E4A33"/>
+                </a:solidFill>
+                <a:latin typeface="Calibri"/>
+              </a:rPr>
+              <a:t>GPP fetch pipeline is built and working - revisit if/when a longer GPP history becomes available (e.g. a different product or date range).</a:t>
+            </a:r>
+          </a:p>
+        </p:txBody>
+      </p:sp>
+    </p:spTree>
+  </p:cSld>
+  <p:clrMapOvr>
+    <a:masterClrMapping/>
+  </p:clrMapOvr>
+</p:sld>
+</file>
+
+<file path=ppt/slides/slide11.xml><?xml version="1.0" encoding="utf-8"?>
+<p:sld xmlns:a="http://schemas.openxmlformats.org/drawingml/2006/main" xmlns:p="http://schemas.openxmlformats.org/presentationml/2006/main" xmlns:r="http://schemas.openxmlformats.org/officeDocument/2006/relationships">
+  <p:cSld>
+    <p:bg>
+      <p:bgPr>
+        <a:solidFill>
+          <a:srgbClr val="FFFFFF"/>
+        </a:solidFill>
+        <a:effectLst/>
+      </p:bgPr>
+    </p:bg>
+    <p:spTree>
+      <p:nvGrpSpPr>
+        <p:cNvPr id="1" name=""/>
+        <p:cNvGrpSpPr/>
+        <p:nvPr/>
+      </p:nvGrpSpPr>
+      <p:grpSpPr/>
+      <p:sp>
+        <p:nvSpPr>
+          <p:cNvPr id="2" name="TextBox 1"/>
+          <p:cNvSpPr txBox="1"/>
+          <p:nvPr/>
+        </p:nvSpPr>
+        <p:spPr>
+          <a:xfrm>
+            <a:off x="502920" y="384048"/>
+            <a:ext cx="10972800" cy="292608"/>
+          </a:xfrm>
+          <a:prstGeom prst="rect">
+            <a:avLst/>
+          </a:prstGeom>
+          <a:noFill/>
+        </p:spPr>
+        <p:txBody>
+          <a:bodyPr wrap="square" anchor="t" lIns="0" rIns="0" tIns="0" bIns="0">
+            <a:spAutoFit/>
+          </a:bodyPr>
+          <a:lstStyle/>
+          <a:p>
+            <a:pPr algn="l">
+              <a:lnSpc>
+                <a:spcPct val="100000"/>
+              </a:lnSpc>
+            </a:pPr>
+            <a:r>
+              <a:rPr sz="1300" b="1" i="0">
+                <a:solidFill>
+                  <a:srgbClr val="2F6F5E"/>
+                </a:solidFill>
+                <a:latin typeface="Calibri"/>
+              </a:rPr>
+              <a:t>SUMMARY</a:t>
+            </a:r>
+          </a:p>
+        </p:txBody>
+      </p:sp>
+      <p:sp>
+        <p:nvSpPr>
+          <p:cNvPr id="3" name="TextBox 2"/>
+          <p:cNvSpPr txBox="1"/>
+          <p:nvPr/>
+        </p:nvSpPr>
+        <p:spPr>
+          <a:xfrm>
+            <a:off x="502920" y="658368"/>
+            <a:ext cx="11155680" cy="566928"/>
+          </a:xfrm>
+          <a:prstGeom prst="rect">
+            <a:avLst/>
+          </a:prstGeom>
+          <a:noFill/>
+        </p:spPr>
+        <p:txBody>
+          <a:bodyPr wrap="square" anchor="t" lIns="0" rIns="0" tIns="0" bIns="0">
+            <a:spAutoFit/>
+          </a:bodyPr>
+          <a:lstStyle/>
+          <a:p>
+            <a:pPr algn="l">
+              <a:lnSpc>
+                <a:spcPct val="100000"/>
+              </a:lnSpc>
+            </a:pPr>
+            <a:r>
+              <a:rPr sz="2300" b="1" i="0">
+                <a:solidFill>
+                  <a:srgbClr val="1C2119"/>
+                </a:solidFill>
+                <a:latin typeface="Calibri"/>
+              </a:rPr>
+              <a:t>Summary &amp; Next Steps</a:t>
+            </a:r>
+          </a:p>
+        </p:txBody>
+      </p:sp>
+      <p:sp>
+        <p:nvSpPr>
+          <p:cNvPr id="4" name="Rectangle 3"/>
+          <p:cNvSpPr/>
+          <p:nvPr/>
+        </p:nvSpPr>
+        <p:spPr>
+          <a:xfrm>
+            <a:off x="502920" y="1261872"/>
+            <a:ext cx="914400" cy="38100"/>
+          </a:xfrm>
+          <a:prstGeom prst="rect">
+            <a:avLst/>
+          </a:prstGeom>
+          <a:solidFill>
+            <a:srgbClr val="2F6F5E"/>
+          </a:solidFill>
+          <a:ln>
+            <a:noFill/>
+          </a:ln>
+          <a:effectLst/>
+        </p:spPr>
+        <p:style>
+          <a:lnRef idx="1">
+            <a:schemeClr val="accent1"/>
+          </a:lnRef>
+          <a:fillRef idx="3">
+            <a:schemeClr val="accent1"/>
+          </a:fillRef>
+          <a:effectRef idx="2">
+            <a:schemeClr val="accent1"/>
+          </a:effectRef>
+          <a:fontRef idx="minor">
+            <a:schemeClr val="lt1"/>
+          </a:fontRef>
+        </p:style>
+        <p:txBody>
+          <a:bodyPr rtlCol="0" anchor="ctr"/>
+          <a:lstStyle/>
+          <a:p>
+            <a:pPr algn="ctr"/>
+          </a:p>
+        </p:txBody>
+      </p:sp>
+      <p:sp>
+        <p:nvSpPr>
+          <p:cNvPr id="5" name="TextBox 4"/>
+          <p:cNvSpPr txBox="1"/>
+          <p:nvPr/>
+        </p:nvSpPr>
+        <p:spPr>
+          <a:xfrm>
+            <a:off x="11551615" y="384048"/>
+            <a:ext cx="365760" cy="274320"/>
+          </a:xfrm>
+          <a:prstGeom prst="rect">
+            <a:avLst/>
+          </a:prstGeom>
+          <a:noFill/>
+        </p:spPr>
+        <p:txBody>
+          <a:bodyPr wrap="square" anchor="t" lIns="0" rIns="0" tIns="0" bIns="0">
+            <a:spAutoFit/>
+          </a:bodyPr>
+          <a:lstStyle/>
+          <a:p>
+            <a:pPr algn="r">
+              <a:lnSpc>
+                <a:spcPct val="100000"/>
+              </a:lnSpc>
+            </a:pPr>
+            <a:r>
+              <a:rPr sz="1100" b="0" i="0">
+                <a:solidFill>
+                  <a:srgbClr val="8B9382"/>
+                </a:solidFill>
+                <a:latin typeface="Calibri"/>
+              </a:rPr>
+              <a:t>11</a:t>
+            </a:r>
+          </a:p>
+        </p:txBody>
+      </p:sp>
+      <p:sp>
+        <p:nvSpPr>
+          <p:cNvPr id="6" name="TextBox 5"/>
+          <p:cNvSpPr txBox="1"/>
+          <p:nvPr/>
+        </p:nvSpPr>
+        <p:spPr>
+          <a:xfrm>
+            <a:off x="502920" y="1143000"/>
+            <a:ext cx="10789920" cy="274320"/>
+          </a:xfrm>
+          <a:prstGeom prst="rect">
+            <a:avLst/>
+          </a:prstGeom>
+          <a:noFill/>
+        </p:spPr>
+        <p:txBody>
+          <a:bodyPr wrap="square" anchor="t" lIns="0" rIns="0" tIns="0" bIns="0">
+            <a:spAutoFit/>
+          </a:bodyPr>
+          <a:lstStyle/>
+          <a:p>
+            <a:pPr algn="l">
+              <a:lnSpc>
+                <a:spcPct val="100000"/>
+              </a:lnSpc>
+            </a:pPr>
+            <a:r>
+              <a:rPr sz="1300" b="1" i="0">
+                <a:solidFill>
+                  <a:srgbClr val="1E4A33"/>
+                </a:solidFill>
+                <a:latin typeface="Calibri"/>
+              </a:rPr>
+              <a:t>WHAT WAS BUILT</a:t>
+            </a:r>
+          </a:p>
+        </p:txBody>
+      </p:sp>
+      <p:sp>
+        <p:nvSpPr>
+          <p:cNvPr id="7" name="TextBox 6"/>
+          <p:cNvSpPr txBox="1"/>
+          <p:nvPr/>
+        </p:nvSpPr>
+        <p:spPr>
+          <a:xfrm>
+            <a:off x="502920" y="1463040"/>
+            <a:ext cx="10789920" cy="1188720"/>
+          </a:xfrm>
+          <a:prstGeom prst="rect">
+            <a:avLst/>
+          </a:prstGeom>
+          <a:noFill/>
+        </p:spPr>
+        <p:txBody>
+          <a:bodyPr wrap="square" anchor="t" lIns="0" rIns="0">
+            <a:spAutoFit/>
+          </a:bodyPr>
+          <a:lstStyle/>
+          <a:p>
+            <a:pPr>
+              <a:lnSpc>
+                <a:spcPct val="106000"/>
+              </a:lnSpc>
+              <a:spcAft>
+                <a:spcPts val="700"/>
+              </a:spcAft>
+            </a:pPr>
+            <a:r>
+              <a:rPr sz="1400">
+                <a:solidFill>
+                  <a:srgbClr val="2F6F5E"/>
+                </a:solidFill>
+                <a:latin typeface="Calibri"/>
+              </a:rPr>
+              <a:t>▪  </a:t>
+            </a:r>
+            <a:r>
+              <a:rPr sz="1400">
+                <a:solidFill>
+                  <a:srgbClr val="1C2119"/>
+                </a:solidFill>
+                <a:latin typeface="Calibri"/>
+              </a:rPr>
+              <a:t>Two data-correctness issues from last meeting's figures found, root-caused, fixed, and disclosed (scale bug + pixel mislabeling) - all downstream results regenerated.</a:t>
+            </a:r>
+          </a:p>
+          <a:p>
+            <a:pPr>
+              <a:lnSpc>
+                <a:spcPct val="106000"/>
+              </a:lnSpc>
+              <a:spcAft>
+                <a:spcPts val="700"/>
+              </a:spcAft>
+            </a:pPr>
+            <a:r>
+              <a:rPr sz="1400">
+                <a:solidFill>
+                  <a:srgbClr val="2F6F5E"/>
+                </a:solidFill>
+                <a:latin typeface="Calibri"/>
+              </a:rPr>
+              <a:t>▪  </a:t>
+            </a:r>
+            <a:r>
+              <a:rPr sz="1400">
+                <a:solidFill>
+                  <a:srgbClr val="1C2119"/>
+                </a:solidFill>
+                <a:latin typeface="Calibri"/>
+              </a:rPr>
+              <a:t>An end-to-end physics-guided fine-tuning pipeline for Chronos-2, adapted from a recent (KDD'25) physics-guided learning paper to a vegetation variable with no prior physics-ML precedent in this project.</a:t>
+            </a:r>
+          </a:p>
+        </p:txBody>
+      </p:sp>
+      <p:sp>
+        <p:nvSpPr>
+          <p:cNvPr id="8" name="TextBox 7"/>
+          <p:cNvSpPr txBox="1"/>
+          <p:nvPr/>
+        </p:nvSpPr>
+        <p:spPr>
+          <a:xfrm>
+            <a:off x="502920" y="2834640"/>
+            <a:ext cx="10789920" cy="274320"/>
+          </a:xfrm>
+          <a:prstGeom prst="rect">
+            <a:avLst/>
+          </a:prstGeom>
+          <a:noFill/>
+        </p:spPr>
+        <p:txBody>
+          <a:bodyPr wrap="square" anchor="t" lIns="0" rIns="0" tIns="0" bIns="0">
+            <a:spAutoFit/>
+          </a:bodyPr>
+          <a:lstStyle/>
+          <a:p>
+            <a:pPr algn="l">
+              <a:lnSpc>
+                <a:spcPct val="100000"/>
+              </a:lnSpc>
+            </a:pPr>
+            <a:r>
+              <a:rPr sz="1300" b="1" i="0">
+                <a:solidFill>
+                  <a:srgbClr val="B5651D"/>
+                </a:solidFill>
+                <a:latin typeface="Calibri"/>
+              </a:rPr>
+              <a:t>CURRENT RESULT</a:t>
+            </a:r>
+          </a:p>
+        </p:txBody>
+      </p:sp>
+      <p:sp>
+        <p:nvSpPr>
+          <p:cNvPr id="9" name="TextBox 8"/>
+          <p:cNvSpPr txBox="1"/>
+          <p:nvPr/>
+        </p:nvSpPr>
+        <p:spPr>
+          <a:xfrm>
+            <a:off x="502920" y="3154680"/>
+            <a:ext cx="10789920" cy="1005840"/>
+          </a:xfrm>
+          <a:prstGeom prst="rect">
+            <a:avLst/>
+          </a:prstGeom>
+          <a:noFill/>
+        </p:spPr>
+        <p:txBody>
+          <a:bodyPr wrap="square" anchor="t" lIns="0" rIns="0">
+            <a:spAutoFit/>
+          </a:bodyPr>
+          <a:lstStyle/>
+          <a:p>
+            <a:pPr>
+              <a:lnSpc>
+                <a:spcPct val="106000"/>
+              </a:lnSpc>
+              <a:spcAft>
+                <a:spcPts val="700"/>
+              </a:spcAft>
+            </a:pPr>
+            <a:r>
+              <a:rPr sz="1400">
+                <a:solidFill>
+                  <a:srgbClr val="B5651D"/>
+                </a:solidFill>
+                <a:latin typeface="Calibri"/>
+              </a:rPr>
+              <a:t>▪  </a:t>
+            </a:r>
+            <a:r>
+              <a:rPr sz="1400">
+                <a:solidFill>
+                  <a:srgbClr val="1C2119"/>
+                </a:solidFill>
+                <a:latin typeface="Calibri"/>
+              </a:rPr>
+              <a:t>In the small-scale validation, the physics term does not yet consistently improve on plain fine-tuning - plausibly because Chronos-2's own pretrained prior, from large-scale time-series pretraining, already captures much of what the hand-built phenology terms encode.</a:t>
+            </a:r>
+          </a:p>
+        </p:txBody>
+      </p:sp>
+      <p:sp>
+        <p:nvSpPr>
+          <p:cNvPr id="10" name="TextBox 9"/>
+          <p:cNvSpPr txBox="1"/>
+          <p:nvPr/>
+        </p:nvSpPr>
+        <p:spPr>
+          <a:xfrm>
+            <a:off x="502920" y="4343400"/>
+            <a:ext cx="10789920" cy="274320"/>
+          </a:xfrm>
+          <a:prstGeom prst="rect">
+            <a:avLst/>
+          </a:prstGeom>
+          <a:noFill/>
+        </p:spPr>
+        <p:txBody>
+          <a:bodyPr wrap="square" anchor="t" lIns="0" rIns="0" tIns="0" bIns="0">
+            <a:spAutoFit/>
+          </a:bodyPr>
+          <a:lstStyle/>
+          <a:p>
+            <a:pPr algn="l">
+              <a:lnSpc>
+                <a:spcPct val="100000"/>
+              </a:lnSpc>
+            </a:pPr>
+            <a:r>
+              <a:rPr sz="1300" b="1" i="0">
+                <a:solidFill>
+                  <a:srgbClr val="5C6355"/>
+                </a:solidFill>
+                <a:latin typeface="Calibri"/>
+              </a:rPr>
+              <a:t>NEXT STEPS</a:t>
+            </a:r>
+          </a:p>
+        </p:txBody>
+      </p:sp>
+      <p:sp>
+        <p:nvSpPr>
+          <p:cNvPr id="11" name="TextBox 10"/>
+          <p:cNvSpPr txBox="1"/>
+          <p:nvPr/>
+        </p:nvSpPr>
+        <p:spPr>
+          <a:xfrm>
+            <a:off x="502920" y="4663440"/>
+            <a:ext cx="10789920" cy="914400"/>
+          </a:xfrm>
+          <a:prstGeom prst="rect">
+            <a:avLst/>
+          </a:prstGeom>
+          <a:noFill/>
+        </p:spPr>
+        <p:txBody>
+          <a:bodyPr wrap="square" anchor="t" lIns="0" rIns="0">
+            <a:spAutoFit/>
+          </a:bodyPr>
+          <a:lstStyle/>
+          <a:p>
+            <a:pPr>
+              <a:lnSpc>
+                <a:spcPct val="106000"/>
+              </a:lnSpc>
+              <a:spcAft>
+                <a:spcPts val="700"/>
+              </a:spcAft>
+            </a:pPr>
+            <a:r>
+              <a:rPr sz="1400">
+                <a:solidFill>
+                  <a:srgbClr val="5C6355"/>
+                </a:solidFill>
+                <a:latin typeface="Calibri"/>
+              </a:rPr>
+              <a:t>▪  </a:t>
+            </a:r>
+            <a:r>
+              <a:rPr sz="1400">
+                <a:solidFill>
+                  <a:srgbClr val="1C2119"/>
+                </a:solidFill>
+                <a:latin typeface="Calibri"/>
+              </a:rPr>
+              <a:t>Candidates: use the physics field for gap-filling instead of a training-time loss, or test whether it helps more in the weaker global pool, where Chronos-2's implicit prior may be less saturated.</a:t>
+            </a:r>
+          </a:p>
+        </p:txBody>
+      </p:sp>
+      <p:sp>
+        <p:nvSpPr>
+          <p:cNvPr id="12" name="Rectangle 11"/>
+          <p:cNvSpPr/>
+          <p:nvPr/>
+        </p:nvSpPr>
+        <p:spPr>
+          <a:xfrm>
+            <a:off x="0" y="6144768"/>
+            <a:ext cx="12191695" cy="713232"/>
+          </a:xfrm>
+          <a:prstGeom prst="rect">
+            <a:avLst/>
+          </a:prstGeom>
+          <a:solidFill>
+            <a:srgbClr val="E7F0E6"/>
+          </a:solidFill>
+          <a:ln>
+            <a:noFill/>
+          </a:ln>
+          <a:effectLst/>
+        </p:spPr>
+        <p:style>
+          <a:lnRef idx="1">
+            <a:schemeClr val="accent1"/>
+          </a:lnRef>
+          <a:fillRef idx="3">
+            <a:schemeClr val="accent1"/>
+          </a:fillRef>
+          <a:effectRef idx="2">
+            <a:schemeClr val="accent1"/>
+          </a:effectRef>
+          <a:fontRef idx="minor">
+            <a:schemeClr val="lt1"/>
+          </a:fontRef>
+        </p:style>
+        <p:txBody>
+          <a:bodyPr rtlCol="0" anchor="ctr"/>
+          <a:lstStyle/>
+          <a:p>
+            <a:pPr algn="ctr"/>
+          </a:p>
+        </p:txBody>
+      </p:sp>
+      <p:sp>
+        <p:nvSpPr>
+          <p:cNvPr id="13" name="Rectangle 12"/>
+          <p:cNvSpPr/>
+          <p:nvPr/>
+        </p:nvSpPr>
+        <p:spPr>
+          <a:xfrm>
+            <a:off x="0" y="6144768"/>
+            <a:ext cx="109728" cy="713232"/>
+          </a:xfrm>
+          <a:prstGeom prst="rect">
+            <a:avLst/>
+          </a:prstGeom>
+          <a:solidFill>
+            <a:srgbClr val="2F6F5E"/>
+          </a:solidFill>
+          <a:ln>
+            <a:noFill/>
+          </a:ln>
+          <a:effectLst/>
+        </p:spPr>
+        <p:style>
+          <a:lnRef idx="1">
+            <a:schemeClr val="accent1"/>
+          </a:lnRef>
+          <a:fillRef idx="3">
+            <a:schemeClr val="accent1"/>
+          </a:fillRef>
+          <a:effectRef idx="2">
+            <a:schemeClr val="accent1"/>
+          </a:effectRef>
+          <a:fontRef idx="minor">
+            <a:schemeClr val="lt1"/>
+          </a:fontRef>
+        </p:style>
+        <p:txBody>
+          <a:bodyPr rtlCol="0" anchor="ctr"/>
+          <a:lstStyle/>
+          <a:p>
+            <a:pPr algn="ctr"/>
+          </a:p>
+        </p:txBody>
+      </p:sp>
+      <p:sp>
+        <p:nvSpPr>
+          <p:cNvPr id="14" name="TextBox 13"/>
+          <p:cNvSpPr txBox="1"/>
+          <p:nvPr/>
+        </p:nvSpPr>
+        <p:spPr>
+          <a:xfrm>
+            <a:off x="411480" y="6144768"/>
+            <a:ext cx="11368735" cy="713232"/>
+          </a:xfrm>
+          <a:prstGeom prst="rect">
+            <a:avLst/>
+          </a:prstGeom>
+          <a:noFill/>
+        </p:spPr>
+        <p:txBody>
+          <a:bodyPr wrap="square" anchor="ctr" lIns="0" rIns="0" tIns="0" bIns="0">
+            <a:spAutoFit/>
+          </a:bodyPr>
+          <a:lstStyle/>
+          <a:p>
+            <a:pPr algn="l">
+              <a:lnSpc>
+                <a:spcPct val="100000"/>
+              </a:lnSpc>
+            </a:pPr>
+            <a:r>
+              <a:rPr sz="1200" b="1" i="0">
+                <a:solidFill>
+                  <a:srgbClr val="1E4A33"/>
+                </a:solidFill>
+                <a:latin typeface="Calibri"/>
+              </a:rPr>
+              <a:t>TAKEAWAY   </a:t>
+            </a:r>
+          </a:p>
+        </p:txBody>
+      </p:sp>
+      <p:sp>
+        <p:nvSpPr>
+          <p:cNvPr id="15" name="TextBox 14"/>
+          <p:cNvSpPr txBox="1"/>
+          <p:nvPr/>
+        </p:nvSpPr>
+        <p:spPr>
+          <a:xfrm>
+            <a:off x="1417320" y="6144768"/>
+            <a:ext cx="10362895" cy="713232"/>
+          </a:xfrm>
+          <a:prstGeom prst="rect">
+            <a:avLst/>
+          </a:prstGeom>
+          <a:noFill/>
+        </p:spPr>
+        <p:txBody>
+          <a:bodyPr wrap="square" anchor="ctr" lIns="0" rIns="0" tIns="0" bIns="0">
+            <a:spAutoFit/>
+          </a:bodyPr>
+          <a:lstStyle/>
+          <a:p>
+            <a:pPr algn="l">
+              <a:lnSpc>
+                <a:spcPct val="100000"/>
+              </a:lnSpc>
+            </a:pPr>
+            <a:r>
+              <a:rPr sz="1450" b="1" i="0">
+                <a:solidFill>
+                  <a:srgbClr val="1E4A33"/>
+                </a:solidFill>
+                <a:latin typeface="Calibri"/>
+              </a:rPr>
+              <a:t>Both workstreams are now in a clean, documented, reproducible state - ready for discussion.</a:t>
             </a:r>
           </a:p>
         </p:txBody>
@@ -7643,11 +8785,11 @@
             <a:r>
               <a:rPr sz="1300" b="1" i="0">
                 <a:solidFill>
-                  <a:srgbClr val="2F6F5E"/>
-                </a:solidFill>
-                <a:latin typeface="Calibri"/>
-              </a:rPr>
-              <a:t>SUMMARY</a:t>
+                  <a:srgbClr val="2A78D6"/>
+                </a:solidFill>
+                <a:latin typeface="Calibri"/>
+              </a:rPr>
+              <a:t>PHYSICS-GUIDED FINE-TUNING, ROUND 2</a:t>
             </a:r>
           </a:p>
         </p:txBody>
@@ -7686,7 +8828,7 @@
                 </a:solidFill>
                 <a:latin typeface="Calibri"/>
               </a:rPr>
-              <a:t>Summary &amp; Next Steps</a:t>
+              <a:t>Follow-Up: A More Targeted Growth-Mortality Equation</a:t>
             </a:r>
           </a:p>
         </p:txBody>
@@ -7706,7 +8848,7 @@
             <a:avLst/>
           </a:prstGeom>
           <a:solidFill>
-            <a:srgbClr val="2F6F5E"/>
+            <a:srgbClr val="2A78D6"/>
           </a:solidFill>
           <a:ln>
             <a:noFill/>
@@ -7783,7 +8925,7 @@
         <p:spPr>
           <a:xfrm>
             <a:off x="502920" y="1143000"/>
-            <a:ext cx="10789920" cy="274320"/>
+            <a:ext cx="10789920" cy="1188720"/>
           </a:xfrm>
           <a:prstGeom prst="rect">
             <a:avLst/>
@@ -7791,38 +8933,74 @@
           <a:noFill/>
         </p:spPr>
         <p:txBody>
-          <a:bodyPr wrap="square" anchor="t" lIns="0" rIns="0" tIns="0" bIns="0">
+          <a:bodyPr wrap="square" anchor="t" lIns="0" rIns="0">
             <a:spAutoFit/>
           </a:bodyPr>
           <a:lstStyle/>
           <a:p>
-            <a:pPr algn="l">
+            <a:pPr>
               <a:lnSpc>
-                <a:spcPct val="100000"/>
+                <a:spcPct val="106000"/>
               </a:lnSpc>
+              <a:spcAft>
+                <a:spcPts val="800"/>
+              </a:spcAft>
             </a:pPr>
             <a:r>
-              <a:rPr sz="1300" b="1" i="0">
-                <a:solidFill>
-                  <a:srgbClr val="1E4A33"/>
-                </a:solidFill>
-                <a:latin typeface="Calibri"/>
-              </a:rPr>
-              <a:t>WHAT WAS BUILT</a:t>
-            </a:r>
-          </a:p>
-        </p:txBody>
-      </p:sp>
-      <p:sp>
-        <p:nvSpPr>
-          <p:cNvPr id="7" name="TextBox 6"/>
+              <a:rPr sz="1450">
+                <a:solidFill>
+                  <a:srgbClr val="2F6F5E"/>
+                </a:solidFill>
+                <a:latin typeface="Calibri"/>
+              </a:rPr>
+              <a:t>▪  </a:t>
+            </a:r>
+            <a:r>
+              <a:rPr sz="1450">
+                <a:solidFill>
+                  <a:srgbClr val="1C2119"/>
+                </a:solidFill>
+                <a:latin typeface="Calibri"/>
+              </a:rPr>
+              <a:t>Diagnosis: the hand-built candidate-term library used in slides 4-7 wasn't the equation actually being proposed - Prof. Wang's analysis after that meeting was that a generic linear library undersells the physics, and suggested this specific logistic growth-mortality form instead, with V as GPP:</a:t>
+            </a:r>
+          </a:p>
+        </p:txBody>
+      </p:sp>
+      <p:pic>
+        <p:nvPicPr>
+          <p:cNvPr id="7" name="Picture 6" descr="phenology_equation.png"/>
+          <p:cNvPicPr>
+            <a:picLocks noChangeAspect="1"/>
+          </p:cNvPicPr>
+          <p:nvPr/>
+        </p:nvPicPr>
+        <p:blipFill>
+          <a:blip r:embed="rId2"/>
+          <a:stretch>
+            <a:fillRect/>
+          </a:stretch>
+        </p:blipFill>
+        <p:spPr>
+          <a:xfrm>
+            <a:off x="2080615" y="2423160"/>
+            <a:ext cx="8030464" cy="1280160"/>
+          </a:xfrm>
+          <a:prstGeom prst="rect">
+            <a:avLst/>
+          </a:prstGeom>
+        </p:spPr>
+      </p:pic>
+      <p:sp>
+        <p:nvSpPr>
+          <p:cNvPr id="8" name="TextBox 7"/>
           <p:cNvSpPr txBox="1"/>
           <p:nvPr/>
         </p:nvSpPr>
         <p:spPr>
           <a:xfrm>
-            <a:off x="502920" y="1463040"/>
-            <a:ext cx="10789920" cy="1188720"/>
+            <a:off x="502920" y="3840480"/>
+            <a:ext cx="10789920" cy="1280160"/>
           </a:xfrm>
           <a:prstGeom prst="rect">
             <a:avLst/>
@@ -7844,22 +9022,22 @@
               </a:spcAft>
             </a:pPr>
             <a:r>
-              <a:rPr sz="1400">
-                <a:solidFill>
-                  <a:srgbClr val="2F6F5E"/>
+              <a:rPr sz="1350">
+                <a:solidFill>
+                  <a:srgbClr val="5C6355"/>
                 </a:solidFill>
                 <a:latin typeface="Calibri"/>
               </a:rPr>
               <a:t>▪  </a:t>
             </a:r>
             <a:r>
-              <a:rPr sz="1400">
+              <a:rPr sz="1350">
                 <a:solidFill>
                   <a:srgbClr val="1C2119"/>
                 </a:solidFill>
                 <a:latin typeface="Calibri"/>
               </a:rPr>
-              <a:t>Two data-correctness issues from last meeting's figures found, root-caused, fixed, and disclosed (scale bug + pixel mislabeling) - all downstream results regenerated.</a:t>
+              <a:t>r/K/m are now each their OWN small network (light/temperature-limited growth; water-limited carrying capacity; drought/freeze-driven mortality) - not a single linear coefficient library - a genuinely different, nonlinear model, matching the equation's own structure.</a:t>
             </a:r>
           </a:p>
           <a:p>
@@ -7872,209 +9050,29 @@
               </a:spcAft>
             </a:pPr>
             <a:r>
-              <a:rPr sz="1400">
-                <a:solidFill>
-                  <a:srgbClr val="2F6F5E"/>
+              <a:rPr sz="1350">
+                <a:solidFill>
+                  <a:srgbClr val="5C6355"/>
                 </a:solidFill>
                 <a:latin typeface="Calibri"/>
               </a:rPr>
               <a:t>▪  </a:t>
             </a:r>
             <a:r>
-              <a:rPr sz="1400">
+              <a:rPr sz="1350">
                 <a:solidFill>
                   <a:srgbClr val="1C2119"/>
                 </a:solidFill>
                 <a:latin typeface="Calibri"/>
               </a:rPr>
-              <a:t>An end-to-end physics-guided fine-tuning pipeline for Chronos-2, adapted from a recent (KDD'25) physics-guided learning paper to a vegetation variable with no prior physics-ML precedent in this project.</a:t>
-            </a:r>
-          </a:p>
-        </p:txBody>
-      </p:sp>
-      <p:sp>
-        <p:nvSpPr>
-          <p:cNvPr id="8" name="TextBox 7"/>
-          <p:cNvSpPr txBox="1"/>
-          <p:nvPr/>
-        </p:nvSpPr>
-        <p:spPr>
-          <a:xfrm>
-            <a:off x="502920" y="2834640"/>
-            <a:ext cx="10789920" cy="274320"/>
-          </a:xfrm>
-          <a:prstGeom prst="rect">
-            <a:avLst/>
-          </a:prstGeom>
-          <a:noFill/>
-        </p:spPr>
-        <p:txBody>
-          <a:bodyPr wrap="square" anchor="t" lIns="0" rIns="0" tIns="0" bIns="0">
-            <a:spAutoFit/>
-          </a:bodyPr>
-          <a:lstStyle/>
-          <a:p>
-            <a:pPr algn="l">
-              <a:lnSpc>
-                <a:spcPct val="100000"/>
-              </a:lnSpc>
-            </a:pPr>
-            <a:r>
-              <a:rPr sz="1300" b="1" i="0">
-                <a:solidFill>
-                  <a:srgbClr val="B5651D"/>
-                </a:solidFill>
-                <a:latin typeface="Calibri"/>
-              </a:rPr>
-              <a:t>CURRENT RESULT</a:t>
-            </a:r>
-          </a:p>
-        </p:txBody>
-      </p:sp>
-      <p:sp>
-        <p:nvSpPr>
-          <p:cNvPr id="9" name="TextBox 8"/>
-          <p:cNvSpPr txBox="1"/>
-          <p:nvPr/>
-        </p:nvSpPr>
-        <p:spPr>
-          <a:xfrm>
-            <a:off x="502920" y="3154680"/>
-            <a:ext cx="10789920" cy="1005840"/>
-          </a:xfrm>
-          <a:prstGeom prst="rect">
-            <a:avLst/>
-          </a:prstGeom>
-          <a:noFill/>
-        </p:spPr>
-        <p:txBody>
-          <a:bodyPr wrap="square" anchor="t" lIns="0" rIns="0">
-            <a:spAutoFit/>
-          </a:bodyPr>
-          <a:lstStyle/>
-          <a:p>
-            <a:pPr>
-              <a:lnSpc>
-                <a:spcPct val="106000"/>
-              </a:lnSpc>
-              <a:spcAft>
-                <a:spcPts val="700"/>
-              </a:spcAft>
-            </a:pPr>
-            <a:r>
-              <a:rPr sz="1400">
-                <a:solidFill>
-                  <a:srgbClr val="B5651D"/>
-                </a:solidFill>
-                <a:latin typeface="Calibri"/>
-              </a:rPr>
-              <a:t>▪  </a:t>
-            </a:r>
-            <a:r>
-              <a:rPr sz="1400">
-                <a:solidFill>
-                  <a:srgbClr val="1C2119"/>
-                </a:solidFill>
-                <a:latin typeface="Calibri"/>
-              </a:rPr>
-              <a:t>In the small-scale validation, the physics term does not yet consistently improve on plain fine-tuning - plausibly because Chronos-2's own pretrained prior, from large-scale time-series pretraining, already captures much of what the hand-built phenology terms encode.</a:t>
-            </a:r>
-          </a:p>
-        </p:txBody>
-      </p:sp>
-      <p:sp>
-        <p:nvSpPr>
-          <p:cNvPr id="10" name="TextBox 9"/>
-          <p:cNvSpPr txBox="1"/>
-          <p:nvPr/>
-        </p:nvSpPr>
-        <p:spPr>
-          <a:xfrm>
-            <a:off x="502920" y="4343400"/>
-            <a:ext cx="10789920" cy="274320"/>
-          </a:xfrm>
-          <a:prstGeom prst="rect">
-            <a:avLst/>
-          </a:prstGeom>
-          <a:noFill/>
-        </p:spPr>
-        <p:txBody>
-          <a:bodyPr wrap="square" anchor="t" lIns="0" rIns="0" tIns="0" bIns="0">
-            <a:spAutoFit/>
-          </a:bodyPr>
-          <a:lstStyle/>
-          <a:p>
-            <a:pPr algn="l">
-              <a:lnSpc>
-                <a:spcPct val="100000"/>
-              </a:lnSpc>
-            </a:pPr>
-            <a:r>
-              <a:rPr sz="1300" b="1" i="0">
-                <a:solidFill>
-                  <a:srgbClr val="5C6355"/>
-                </a:solidFill>
-                <a:latin typeface="Calibri"/>
-              </a:rPr>
-              <a:t>NEXT STEPS</a:t>
-            </a:r>
-          </a:p>
-        </p:txBody>
-      </p:sp>
-      <p:sp>
-        <p:nvSpPr>
-          <p:cNvPr id="11" name="TextBox 10"/>
-          <p:cNvSpPr txBox="1"/>
-          <p:nvPr/>
-        </p:nvSpPr>
-        <p:spPr>
-          <a:xfrm>
-            <a:off x="502920" y="4663440"/>
-            <a:ext cx="10789920" cy="914400"/>
-          </a:xfrm>
-          <a:prstGeom prst="rect">
-            <a:avLst/>
-          </a:prstGeom>
-          <a:noFill/>
-        </p:spPr>
-        <p:txBody>
-          <a:bodyPr wrap="square" anchor="t" lIns="0" rIns="0">
-            <a:spAutoFit/>
-          </a:bodyPr>
-          <a:lstStyle/>
-          <a:p>
-            <a:pPr>
-              <a:lnSpc>
-                <a:spcPct val="106000"/>
-              </a:lnSpc>
-              <a:spcAft>
-                <a:spcPts val="700"/>
-              </a:spcAft>
-            </a:pPr>
-            <a:r>
-              <a:rPr sz="1400">
-                <a:solidFill>
-                  <a:srgbClr val="5C6355"/>
-                </a:solidFill>
-                <a:latin typeface="Calibri"/>
-              </a:rPr>
-              <a:t>▪  </a:t>
-            </a:r>
-            <a:r>
-              <a:rPr sz="1400">
-                <a:solidFill>
-                  <a:srgbClr val="1C2119"/>
-                </a:solidFill>
-                <a:latin typeface="Calibri"/>
-              </a:rPr>
-              <a:t>Candidates: use the physics field for gap-filling instead of a training-time loss, or test whether it helps more in the weaker global pool, where Chronos-2's implicit prior may be less saturated.</a:t>
-            </a:r>
-          </a:p>
-        </p:txBody>
-      </p:sp>
-      <p:sp>
-        <p:nvSpPr>
-          <p:cNvPr id="12" name="Rectangle 11"/>
+              <a:t>GPP, PAR, soil moisture, and SPEI are not present anywhere in this project's existing data (verified by direct search, not assumed) - see slide 7d for what was fetched/approximated and what's still missing.</a:t>
+            </a:r>
+          </a:p>
+        </p:txBody>
+      </p:sp>
+      <p:sp>
+        <p:nvSpPr>
+          <p:cNvPr id="9" name="Rectangle 8"/>
           <p:cNvSpPr/>
           <p:nvPr/>
         </p:nvSpPr>
@@ -8087,7 +9085,7 @@
             <a:avLst/>
           </a:prstGeom>
           <a:solidFill>
-            <a:srgbClr val="E7F0E6"/>
+            <a:srgbClr val="E2ECFA"/>
           </a:solidFill>
           <a:ln>
             <a:noFill/>
@@ -8118,7 +9116,7 @@
       </p:sp>
       <p:sp>
         <p:nvSpPr>
-          <p:cNvPr id="13" name="Rectangle 12"/>
+          <p:cNvPr id="10" name="Rectangle 9"/>
           <p:cNvSpPr/>
           <p:nvPr/>
         </p:nvSpPr>
@@ -8131,7 +9129,7 @@
             <a:avLst/>
           </a:prstGeom>
           <a:solidFill>
-            <a:srgbClr val="2F6F5E"/>
+            <a:srgbClr val="2A78D6"/>
           </a:solidFill>
           <a:ln>
             <a:noFill/>
@@ -8162,7 +9160,7 @@
       </p:sp>
       <p:sp>
         <p:nvSpPr>
-          <p:cNvPr id="14" name="TextBox 13"/>
+          <p:cNvPr id="11" name="TextBox 10"/>
           <p:cNvSpPr txBox="1"/>
           <p:nvPr/>
         </p:nvSpPr>
@@ -8190,7 +9188,7 @@
             <a:r>
               <a:rPr sz="1200" b="1" i="0">
                 <a:solidFill>
-                  <a:srgbClr val="1E4A33"/>
+                  <a:srgbClr val="143A6B"/>
                 </a:solidFill>
                 <a:latin typeface="Calibri"/>
               </a:rPr>
@@ -8201,7 +9199,7 @@
       </p:sp>
       <p:sp>
         <p:nvSpPr>
-          <p:cNvPr id="15" name="TextBox 14"/>
+          <p:cNvPr id="12" name="TextBox 11"/>
           <p:cNvSpPr txBox="1"/>
           <p:nvPr/>
         </p:nvSpPr>
@@ -8229,11 +9227,624 @@
             <a:r>
               <a:rPr sz="1450" b="1" i="0">
                 <a:solidFill>
+                  <a:srgbClr val="143A6B"/>
+                </a:solidFill>
+                <a:latin typeface="Calibri"/>
+              </a:rPr>
+              <a:t>Re-ran the physics-guided Stage 1 with THIS exact equation (not the earlier ad hoc one) - the supplementary validation this follow-up asked for - see slide 7c for the result.</a:t>
+            </a:r>
+          </a:p>
+        </p:txBody>
+      </p:sp>
+    </p:spTree>
+  </p:cSld>
+  <p:clrMapOvr>
+    <a:masterClrMapping/>
+  </p:clrMapOvr>
+</p:sld>
+</file>
+
+<file path=ppt/slides/slide9.xml><?xml version="1.0" encoding="utf-8"?>
+<p:sld xmlns:a="http://schemas.openxmlformats.org/drawingml/2006/main" xmlns:p="http://schemas.openxmlformats.org/presentationml/2006/main" xmlns:r="http://schemas.openxmlformats.org/officeDocument/2006/relationships">
+  <p:cSld>
+    <p:bg>
+      <p:bgPr>
+        <a:solidFill>
+          <a:srgbClr val="FFFFFF"/>
+        </a:solidFill>
+        <a:effectLst/>
+      </p:bgPr>
+    </p:bg>
+    <p:spTree>
+      <p:nvGrpSpPr>
+        <p:cNvPr id="1" name=""/>
+        <p:cNvGrpSpPr/>
+        <p:nvPr/>
+      </p:nvGrpSpPr>
+      <p:grpSpPr/>
+      <p:sp>
+        <p:nvSpPr>
+          <p:cNvPr id="2" name="TextBox 1"/>
+          <p:cNvSpPr txBox="1"/>
+          <p:nvPr/>
+        </p:nvSpPr>
+        <p:spPr>
+          <a:xfrm>
+            <a:off x="502920" y="384048"/>
+            <a:ext cx="10972800" cy="292608"/>
+          </a:xfrm>
+          <a:prstGeom prst="rect">
+            <a:avLst/>
+          </a:prstGeom>
+          <a:noFill/>
+        </p:spPr>
+        <p:txBody>
+          <a:bodyPr wrap="square" anchor="t" lIns="0" rIns="0" tIns="0" bIns="0">
+            <a:spAutoFit/>
+          </a:bodyPr>
+          <a:lstStyle/>
+          <a:p>
+            <a:pPr algn="l">
+              <a:lnSpc>
+                <a:spcPct val="100000"/>
+              </a:lnSpc>
+            </a:pPr>
+            <a:r>
+              <a:rPr sz="1300" b="1" i="0">
+                <a:solidFill>
+                  <a:srgbClr val="2A78D6"/>
+                </a:solidFill>
+                <a:latin typeface="Calibri"/>
+              </a:rPr>
+              <a:t>PHYSICS-GUIDED FINE-TUNING, ROUND 2</a:t>
+            </a:r>
+          </a:p>
+        </p:txBody>
+      </p:sp>
+      <p:sp>
+        <p:nvSpPr>
+          <p:cNvPr id="3" name="TextBox 2"/>
+          <p:cNvSpPr txBox="1"/>
+          <p:nvPr/>
+        </p:nvSpPr>
+        <p:spPr>
+          <a:xfrm>
+            <a:off x="502920" y="658368"/>
+            <a:ext cx="11155680" cy="566928"/>
+          </a:xfrm>
+          <a:prstGeom prst="rect">
+            <a:avLst/>
+          </a:prstGeom>
+          <a:noFill/>
+        </p:spPr>
+        <p:txBody>
+          <a:bodyPr wrap="square" anchor="t" lIns="0" rIns="0" tIns="0" bIns="0">
+            <a:spAutoFit/>
+          </a:bodyPr>
+          <a:lstStyle/>
+          <a:p>
+            <a:pPr algn="l">
+              <a:lnSpc>
+                <a:spcPct val="100000"/>
+              </a:lnSpc>
+            </a:pPr>
+            <a:r>
+              <a:rPr sz="2300" b="1" i="0">
+                <a:solidFill>
+                  <a:srgbClr val="1C2119"/>
+                </a:solidFill>
+                <a:latin typeface="Calibri"/>
+              </a:rPr>
+              <a:t>Validation: Fitting the Exact Equation to LAI</a:t>
+            </a:r>
+          </a:p>
+        </p:txBody>
+      </p:sp>
+      <p:sp>
+        <p:nvSpPr>
+          <p:cNvPr id="4" name="Rectangle 3"/>
+          <p:cNvSpPr/>
+          <p:nvPr/>
+        </p:nvSpPr>
+        <p:spPr>
+          <a:xfrm>
+            <a:off x="502920" y="1261872"/>
+            <a:ext cx="914400" cy="38100"/>
+          </a:xfrm>
+          <a:prstGeom prst="rect">
+            <a:avLst/>
+          </a:prstGeom>
+          <a:solidFill>
+            <a:srgbClr val="2A78D6"/>
+          </a:solidFill>
+          <a:ln>
+            <a:noFill/>
+          </a:ln>
+          <a:effectLst/>
+        </p:spPr>
+        <p:style>
+          <a:lnRef idx="1">
+            <a:schemeClr val="accent1"/>
+          </a:lnRef>
+          <a:fillRef idx="3">
+            <a:schemeClr val="accent1"/>
+          </a:fillRef>
+          <a:effectRef idx="2">
+            <a:schemeClr val="accent1"/>
+          </a:effectRef>
+          <a:fontRef idx="minor">
+            <a:schemeClr val="lt1"/>
+          </a:fontRef>
+        </p:style>
+        <p:txBody>
+          <a:bodyPr rtlCol="0" anchor="ctr"/>
+          <a:lstStyle/>
+          <a:p>
+            <a:pPr algn="ctr"/>
+          </a:p>
+        </p:txBody>
+      </p:sp>
+      <p:sp>
+        <p:nvSpPr>
+          <p:cNvPr id="5" name="TextBox 4"/>
+          <p:cNvSpPr txBox="1"/>
+          <p:nvPr/>
+        </p:nvSpPr>
+        <p:spPr>
+          <a:xfrm>
+            <a:off x="11551615" y="384048"/>
+            <a:ext cx="365760" cy="274320"/>
+          </a:xfrm>
+          <a:prstGeom prst="rect">
+            <a:avLst/>
+          </a:prstGeom>
+          <a:noFill/>
+        </p:spPr>
+        <p:txBody>
+          <a:bodyPr wrap="square" anchor="t" lIns="0" rIns="0" tIns="0" bIns="0">
+            <a:spAutoFit/>
+          </a:bodyPr>
+          <a:lstStyle/>
+          <a:p>
+            <a:pPr algn="r">
+              <a:lnSpc>
+                <a:spcPct val="100000"/>
+              </a:lnSpc>
+            </a:pPr>
+            <a:r>
+              <a:rPr sz="1100" b="0" i="0">
+                <a:solidFill>
+                  <a:srgbClr val="8B9382"/>
+                </a:solidFill>
+                <a:latin typeface="Calibri"/>
+              </a:rPr>
+              <a:t>9</a:t>
+            </a:r>
+          </a:p>
+        </p:txBody>
+      </p:sp>
+      <p:pic>
+        <p:nvPicPr>
+          <p:cNvPr id="6" name="Picture 5" descr="phenology_lai_reconstruction.png"/>
+          <p:cNvPicPr>
+            <a:picLocks noChangeAspect="1"/>
+          </p:cNvPicPr>
+          <p:nvPr/>
+        </p:nvPicPr>
+        <p:blipFill>
+          <a:blip r:embed="rId2"/>
+          <a:stretch>
+            <a:fillRect/>
+          </a:stretch>
+        </p:blipFill>
+        <p:spPr>
+          <a:xfrm>
+            <a:off x="502920" y="1825962"/>
+            <a:ext cx="6949440" cy="3498683"/>
+          </a:xfrm>
+          <a:prstGeom prst="rect">
+            <a:avLst/>
+          </a:prstGeom>
+        </p:spPr>
+      </p:pic>
+      <p:sp>
+        <p:nvSpPr>
+          <p:cNvPr id="7" name="TextBox 6"/>
+          <p:cNvSpPr txBox="1"/>
+          <p:nvPr/>
+        </p:nvSpPr>
+        <p:spPr>
+          <a:xfrm>
+            <a:off x="7680960" y="1143000"/>
+            <a:ext cx="4023360" cy="274320"/>
+          </a:xfrm>
+          <a:prstGeom prst="rect">
+            <a:avLst/>
+          </a:prstGeom>
+          <a:noFill/>
+        </p:spPr>
+        <p:txBody>
+          <a:bodyPr wrap="square" anchor="t" lIns="0" rIns="0" tIns="0" bIns="0">
+            <a:spAutoFit/>
+          </a:bodyPr>
+          <a:lstStyle/>
+          <a:p>
+            <a:pPr algn="l">
+              <a:lnSpc>
+                <a:spcPct val="100000"/>
+              </a:lnSpc>
+            </a:pPr>
+            <a:r>
+              <a:rPr sz="1300" b="1" i="0">
+                <a:solidFill>
                   <a:srgbClr val="1E4A33"/>
                 </a:solidFill>
                 <a:latin typeface="Calibri"/>
               </a:rPr>
-              <a:t>Both workstreams are now in a clean, documented, reproducible state - ready for discussion.</a:t>
+              <a:t>RESULT</a:t>
+            </a:r>
+          </a:p>
+        </p:txBody>
+      </p:sp>
+      <p:sp>
+        <p:nvSpPr>
+          <p:cNvPr id="8" name="TextBox 7"/>
+          <p:cNvSpPr txBox="1"/>
+          <p:nvPr/>
+        </p:nvSpPr>
+        <p:spPr>
+          <a:xfrm>
+            <a:off x="7680960" y="1508760"/>
+            <a:ext cx="4023360" cy="1463040"/>
+          </a:xfrm>
+          <a:prstGeom prst="rect">
+            <a:avLst/>
+          </a:prstGeom>
+          <a:noFill/>
+        </p:spPr>
+        <p:txBody>
+          <a:bodyPr wrap="square" anchor="t" lIns="0" rIns="0">
+            <a:spAutoFit/>
+          </a:bodyPr>
+          <a:lstStyle/>
+          <a:p>
+            <a:pPr>
+              <a:lnSpc>
+                <a:spcPct val="106000"/>
+              </a:lnSpc>
+              <a:spcAft>
+                <a:spcPts val="800"/>
+              </a:spcAft>
+            </a:pPr>
+            <a:r>
+              <a:rPr sz="1300">
+                <a:solidFill>
+                  <a:srgbClr val="2F6F5E"/>
+                </a:solidFill>
+                <a:latin typeface="Calibri"/>
+              </a:rPr>
+              <a:t>▪  </a:t>
+            </a:r>
+            <a:r>
+              <a:rPr sz="1300">
+                <a:solidFill>
+                  <a:srgbClr val="1C2119"/>
+                </a:solidFill>
+                <a:latin typeface="Calibri"/>
+              </a:rPr>
+              <a:t>Per-site reconstruction: mean R²=0.19, median R²=0.60 (R² unstable at outlier sites, same caveat as the project's other small-sample findings).</a:t>
+            </a:r>
+          </a:p>
+          <a:p>
+            <a:pPr>
+              <a:lnSpc>
+                <a:spcPct val="106000"/>
+              </a:lnSpc>
+              <a:spcAft>
+                <a:spcPts val="800"/>
+              </a:spcAft>
+            </a:pPr>
+            <a:r>
+              <a:rPr sz="1300">
+                <a:solidFill>
+                  <a:srgbClr val="2F6F5E"/>
+                </a:solidFill>
+                <a:latin typeface="Calibri"/>
+              </a:rPr>
+              <a:t>▪  </a:t>
+            </a:r>
+            <a:r>
+              <a:rPr sz="1300">
+                <a:solidFill>
+                  <a:srgbClr val="1C2119"/>
+                </a:solidFill>
+                <a:latin typeface="Calibri"/>
+              </a:rPr>
+              <a:t>Pearson r: mean=0.78, median=0.84 - a clean fit across diverse vegetation types.</a:t>
+            </a:r>
+          </a:p>
+        </p:txBody>
+      </p:sp>
+      <p:sp>
+        <p:nvSpPr>
+          <p:cNvPr id="9" name="TextBox 8"/>
+          <p:cNvSpPr txBox="1"/>
+          <p:nvPr/>
+        </p:nvSpPr>
+        <p:spPr>
+          <a:xfrm>
+            <a:off x="7680960" y="3246120"/>
+            <a:ext cx="4023360" cy="274320"/>
+          </a:xfrm>
+          <a:prstGeom prst="rect">
+            <a:avLst/>
+          </a:prstGeom>
+          <a:noFill/>
+        </p:spPr>
+        <p:txBody>
+          <a:bodyPr wrap="square" anchor="t" lIns="0" rIns="0" tIns="0" bIns="0">
+            <a:spAutoFit/>
+          </a:bodyPr>
+          <a:lstStyle/>
+          <a:p>
+            <a:pPr algn="l">
+              <a:lnSpc>
+                <a:spcPct val="100000"/>
+              </a:lnSpc>
+            </a:pPr>
+            <a:r>
+              <a:rPr sz="1300" b="1" i="0">
+                <a:solidFill>
+                  <a:srgbClr val="B5651D"/>
+                </a:solidFill>
+                <a:latin typeface="Calibri"/>
+              </a:rPr>
+              <a:t>DEBUGGING NOTE</a:t>
+            </a:r>
+          </a:p>
+        </p:txBody>
+      </p:sp>
+      <p:sp>
+        <p:nvSpPr>
+          <p:cNvPr id="10" name="TextBox 9"/>
+          <p:cNvSpPr txBox="1"/>
+          <p:nvPr/>
+        </p:nvSpPr>
+        <p:spPr>
+          <a:xfrm>
+            <a:off x="7680960" y="3611880"/>
+            <a:ext cx="4023360" cy="1828800"/>
+          </a:xfrm>
+          <a:prstGeom prst="rect">
+            <a:avLst/>
+          </a:prstGeom>
+          <a:noFill/>
+        </p:spPr>
+        <p:txBody>
+          <a:bodyPr wrap="square" anchor="t" lIns="0" rIns="0">
+            <a:spAutoFit/>
+          </a:bodyPr>
+          <a:lstStyle/>
+          <a:p>
+            <a:pPr>
+              <a:lnSpc>
+                <a:spcPct val="106000"/>
+              </a:lnSpc>
+              <a:spcAft>
+                <a:spcPts val="600"/>
+              </a:spcAft>
+            </a:pPr>
+            <a:r>
+              <a:rPr sz="1200">
+                <a:solidFill>
+                  <a:srgbClr val="B5651D"/>
+                </a:solidFill>
+                <a:latin typeface="Calibri"/>
+              </a:rPr>
+              <a:t>▪  </a:t>
+            </a:r>
+            <a:r>
+              <a:rPr sz="1200">
+                <a:solidFill>
+                  <a:srgbClr val="1C2119"/>
+                </a:solidFill>
+                <a:latin typeface="Calibri"/>
+              </a:rPr>
+              <a:t>First run: training diverged after a strong start (loss 1.23→0.19, then spiraled) - the 1/K term in the equation can blow up if K is driven near zero.</a:t>
+            </a:r>
+          </a:p>
+          <a:p>
+            <a:pPr>
+              <a:lnSpc>
+                <a:spcPct val="106000"/>
+              </a:lnSpc>
+              <a:spcAft>
+                <a:spcPts val="600"/>
+              </a:spcAft>
+            </a:pPr>
+            <a:r>
+              <a:rPr sz="1200">
+                <a:solidFill>
+                  <a:srgbClr val="B5651D"/>
+                </a:solidFill>
+                <a:latin typeface="Calibri"/>
+              </a:rPr>
+              <a:t>▪  </a:t>
+            </a:r>
+            <a:r>
+              <a:rPr sz="1200">
+                <a:solidFill>
+                  <a:srgbClr val="1C2119"/>
+                </a:solidFill>
+                <a:latin typeface="Calibri"/>
+              </a:rPr>
+              <a:t>Gradient clipping alone made it WORSE (NaN) - the instability is in the forward ODE integration, not just the backward pass. Fixed by clamping V to its only physically-required bound (≥0) plus a loose safety ceiling.</a:t>
+            </a:r>
+          </a:p>
+        </p:txBody>
+      </p:sp>
+      <p:sp>
+        <p:nvSpPr>
+          <p:cNvPr id="11" name="Rectangle 10"/>
+          <p:cNvSpPr/>
+          <p:nvPr/>
+        </p:nvSpPr>
+        <p:spPr>
+          <a:xfrm>
+            <a:off x="0" y="6144768"/>
+            <a:ext cx="12191695" cy="713232"/>
+          </a:xfrm>
+          <a:prstGeom prst="rect">
+            <a:avLst/>
+          </a:prstGeom>
+          <a:solidFill>
+            <a:srgbClr val="E2ECFA"/>
+          </a:solidFill>
+          <a:ln>
+            <a:noFill/>
+          </a:ln>
+          <a:effectLst/>
+        </p:spPr>
+        <p:style>
+          <a:lnRef idx="1">
+            <a:schemeClr val="accent1"/>
+          </a:lnRef>
+          <a:fillRef idx="3">
+            <a:schemeClr val="accent1"/>
+          </a:fillRef>
+          <a:effectRef idx="2">
+            <a:schemeClr val="accent1"/>
+          </a:effectRef>
+          <a:fontRef idx="minor">
+            <a:schemeClr val="lt1"/>
+          </a:fontRef>
+        </p:style>
+        <p:txBody>
+          <a:bodyPr rtlCol="0" anchor="ctr"/>
+          <a:lstStyle/>
+          <a:p>
+            <a:pPr algn="ctr"/>
+          </a:p>
+        </p:txBody>
+      </p:sp>
+      <p:sp>
+        <p:nvSpPr>
+          <p:cNvPr id="12" name="Rectangle 11"/>
+          <p:cNvSpPr/>
+          <p:nvPr/>
+        </p:nvSpPr>
+        <p:spPr>
+          <a:xfrm>
+            <a:off x="0" y="6144768"/>
+            <a:ext cx="109728" cy="713232"/>
+          </a:xfrm>
+          <a:prstGeom prst="rect">
+            <a:avLst/>
+          </a:prstGeom>
+          <a:solidFill>
+            <a:srgbClr val="2A78D6"/>
+          </a:solidFill>
+          <a:ln>
+            <a:noFill/>
+          </a:ln>
+          <a:effectLst/>
+        </p:spPr>
+        <p:style>
+          <a:lnRef idx="1">
+            <a:schemeClr val="accent1"/>
+          </a:lnRef>
+          <a:fillRef idx="3">
+            <a:schemeClr val="accent1"/>
+          </a:fillRef>
+          <a:effectRef idx="2">
+            <a:schemeClr val="accent1"/>
+          </a:effectRef>
+          <a:fontRef idx="minor">
+            <a:schemeClr val="lt1"/>
+          </a:fontRef>
+        </p:style>
+        <p:txBody>
+          <a:bodyPr rtlCol="0" anchor="ctr"/>
+          <a:lstStyle/>
+          <a:p>
+            <a:pPr algn="ctr"/>
+          </a:p>
+        </p:txBody>
+      </p:sp>
+      <p:sp>
+        <p:nvSpPr>
+          <p:cNvPr id="13" name="TextBox 12"/>
+          <p:cNvSpPr txBox="1"/>
+          <p:nvPr/>
+        </p:nvSpPr>
+        <p:spPr>
+          <a:xfrm>
+            <a:off x="411480" y="6144768"/>
+            <a:ext cx="11368735" cy="713232"/>
+          </a:xfrm>
+          <a:prstGeom prst="rect">
+            <a:avLst/>
+          </a:prstGeom>
+          <a:noFill/>
+        </p:spPr>
+        <p:txBody>
+          <a:bodyPr wrap="square" anchor="ctr" lIns="0" rIns="0" tIns="0" bIns="0">
+            <a:spAutoFit/>
+          </a:bodyPr>
+          <a:lstStyle/>
+          <a:p>
+            <a:pPr algn="l">
+              <a:lnSpc>
+                <a:spcPct val="100000"/>
+              </a:lnSpc>
+            </a:pPr>
+            <a:r>
+              <a:rPr sz="1200" b="1" i="0">
+                <a:solidFill>
+                  <a:srgbClr val="143A6B"/>
+                </a:solidFill>
+                <a:latin typeface="Calibri"/>
+              </a:rPr>
+              <a:t>TAKEAWAY   </a:t>
+            </a:r>
+          </a:p>
+        </p:txBody>
+      </p:sp>
+      <p:sp>
+        <p:nvSpPr>
+          <p:cNvPr id="14" name="TextBox 13"/>
+          <p:cNvSpPr txBox="1"/>
+          <p:nvPr/>
+        </p:nvSpPr>
+        <p:spPr>
+          <a:xfrm>
+            <a:off x="1417320" y="6144768"/>
+            <a:ext cx="10362895" cy="713232"/>
+          </a:xfrm>
+          <a:prstGeom prst="rect">
+            <a:avLst/>
+          </a:prstGeom>
+          <a:noFill/>
+        </p:spPr>
+        <p:txBody>
+          <a:bodyPr wrap="square" anchor="ctr" lIns="0" rIns="0" tIns="0" bIns="0">
+            <a:spAutoFit/>
+          </a:bodyPr>
+          <a:lstStyle/>
+          <a:p>
+            <a:pPr algn="l">
+              <a:lnSpc>
+                <a:spcPct val="100000"/>
+              </a:lnSpc>
+            </a:pPr>
+            <a:r>
+              <a:rPr sz="1450" b="1" i="0">
+                <a:solidFill>
+                  <a:srgbClr val="143A6B"/>
+                </a:solidFill>
+                <a:latin typeface="Calibri"/>
+              </a:rPr>
+              <a:t>The exact equation fits LAI well once stabilized - a cleaner, more faithful result than the earlier ad hoc version, and the validation this follow-up specifically asked for.</a:t>
             </a:r>
           </a:p>
         </p:txBody>
